--- a/presentations/migrating_an_instance/from-clicks-to-code-jnuc2026.pptx
+++ b/presentations/migrating_an_instance/from-clicks-to-code-jnuc2026.pptx
@@ -700,7 +700,7 @@
           <a:p>
             <a:r>
               <a:rPr lang="en-US" dirty="0"/>
-              <a:t>Why the ban exists: Terraform runs the bank's whole public cloud - import blocks would let one workspace adopt someone else's resources. The policy is right; it just did not fit a sole-actor migration. Each import window needed a fresh time-bound exception until the standing exception was granted.</a:t>
+              <a:t>The top of this slide is the part that transfers. Whatever they are migrating, it will run inside controls somebody else owns, and that is the normal case rather than bad luck. Take the three in order and keep them general - touch points, owners, exceptions. Do not reach for our story until they have landed. Then the example, briefly, as evidence that this is not theory: Sentinel bans import blocks across the bank's public cloud, production had no CLI, and what got us through was a narrow case on our own facts rather than an argument about the policy. Per-window exceptions first, standing exception once we had made it.</a:t>
             </a:r>
             <a:endParaRPr lang="en-US" dirty="0"/>
           </a:p>

--- a/presentations/migrating_an_instance/from-clicks-to-code-jnuc2026.pptx
+++ b/presentations/migrating_an_instance/from-clicks-to-code-jnuc2026.pptx
@@ -612,7 +612,7 @@
           <a:p>
             <a:r>
               <a:rPr lang="en-US" dirty="0"/>
-              <a:t>November 2025 - the first real state in the repo. Mechanic: import first if the provider supports it - only fall back to apply where there's no import statement. The apply just sets the same values the UI shows, so nothing changes, but the resource lands in state. All settings panes done in about a day.</a:t>
+              <a:t>November 2025 - the first real state in the repo. Point at the id and say what it is: a constant the provider made up, because a singleton has nothing to be identified by. There is only one client check-in. So the import ceremony is optional. Match the resource to what the UI already shows, apply, and Terraform writes values that are already there - no change on the server, but it is now in state. Every settings resource done in about a day.</a:t>
             </a:r>
             <a:endParaRPr lang="en-US" dirty="0"/>
           </a:p>
@@ -1756,7 +1756,7 @@
           <a:p>
             <a:r>
               <a:rPr lang="en-US" dirty="0"/>
-              <a:t>Point at the provider registry, the jamfpy repo once it has a URL, and the other resources on screen; contact details still to confirm.</a:t>
+              <a:t>Where to send people. Start with the Deployment Theory Terraform registry and demo repo, and the training repo built for workplace engineers. Then the community and official set: Jamf developer docs, the Jamf blog IaC walkthrough, the MacAdmins Slack channel, and Neil Martin's starter repo. Point at the QR code on the right and leave this slide up while questions run - it opens a link to this presentation, so nobody needs to photograph the URLs.</a:t>
             </a:r>
             <a:endParaRPr lang="en-US" dirty="0"/>
           </a:p>
